--- a/Agent365-Lab-Overview.pptx
+++ b/Agent365-Lab-Overview.pptx
@@ -3853,7 +3853,7 @@
                 <a:ea typeface="Segoe UI" pitchFamily="34" charset="-122"/>
                 <a:cs typeface="Segoe UI" pitchFamily="34" charset="-120"/>
               </a:rPr>
-              <a:t>Region · resource-group strategy · solution prefix (≤12 chars)</a:t>
+              <a:t>Region · resource-group strategy · lab prefix (≤12 chars, or ≤9 with a Digital Worker)</a:t>
             </a:r>
             <a:endParaRPr lang="en-US" sz="950" dirty="0"/>
           </a:p>
@@ -10628,7 +10628,7 @@
                 <a:ea typeface="Segoe UI" pitchFamily="34" charset="-122"/>
                 <a:cs typeface="Segoe UI" pitchFamily="34" charset="-120"/>
               </a:rPr>
-              <a:t>Hosting = how it runs · Identity = who it acts as. FD-DW is intentionally excluded (a platform limitation).</a:t>
+              <a:t>Hosting = how it runs · Identity = who it acts as · names carry the framework (MAF-ACA-OBO). FD-DW excluded.</a:t>
             </a:r>
             <a:endParaRPr lang="en-US" sz="1000" dirty="0"/>
           </a:p>
